--- a/tests/benchmark/architectural_slides/case_028_energy_metrics_chart/output.pptx
+++ b/tests/benchmark/architectural_slides/case_028_energy_metrics_chart/output.pptx
@@ -910,7 +910,7 @@
         <p:spPr>
           <a:xfrm>
             <a:off x="640080" y="411480"/>
-            <a:ext cx="7863840" cy="457200"/>
+            <a:ext cx="7863840" cy="601218"/>
           </a:xfrm>
           <a:prstGeom prst="rect">
             <a:avLst/>
@@ -948,7 +948,7 @@
         </p:nvSpPr>
         <p:spPr>
           <a:xfrm>
-            <a:off x="640080" y="906780"/>
+            <a:off x="640080" y="1050798"/>
             <a:ext cx="7863840" cy="365760"/>
           </a:xfrm>
           <a:prstGeom prst="rect">
@@ -987,8 +987,8 @@
         </p:nvSpPr>
         <p:spPr>
           <a:xfrm>
-            <a:off x="640080" y="1348740"/>
-            <a:ext cx="2545080" cy="765840"/>
+            <a:off x="640080" y="1492758"/>
+            <a:ext cx="2545080" cy="721195"/>
           </a:xfrm>
           <a:prstGeom prst="rect">
             <a:avLst/>
@@ -1026,8 +1026,8 @@
         </p:nvSpPr>
         <p:spPr>
           <a:xfrm>
-            <a:off x="3299460" y="1348740"/>
-            <a:ext cx="2545080" cy="765840"/>
+            <a:off x="3299460" y="1492758"/>
+            <a:ext cx="2545080" cy="721195"/>
           </a:xfrm>
           <a:prstGeom prst="rect">
             <a:avLst/>
@@ -1065,8 +1065,8 @@
         </p:nvSpPr>
         <p:spPr>
           <a:xfrm>
-            <a:off x="5958840" y="1348740"/>
-            <a:ext cx="2545080" cy="765840"/>
+            <a:off x="5958840" y="1492758"/>
+            <a:ext cx="2545080" cy="721195"/>
           </a:xfrm>
           <a:prstGeom prst="rect">
             <a:avLst/>
@@ -1104,8 +1104,8 @@
         </p:nvSpPr>
         <p:spPr>
           <a:xfrm>
-            <a:off x="640080" y="2228880"/>
-            <a:ext cx="2545080" cy="765840"/>
+            <a:off x="640080" y="2328253"/>
+            <a:ext cx="2545080" cy="721195"/>
           </a:xfrm>
           <a:prstGeom prst="rect">
             <a:avLst/>
@@ -1143,8 +1143,8 @@
         </p:nvSpPr>
         <p:spPr>
           <a:xfrm>
-            <a:off x="640080" y="3109021"/>
-            <a:ext cx="7863840" cy="1008827"/>
+            <a:off x="640080" y="3163748"/>
+            <a:ext cx="7863840" cy="954100"/>
           </a:xfrm>
           <a:prstGeom prst="rect">
             <a:avLst/>
@@ -1168,7 +1168,7 @@
         </p:nvSpPr>
         <p:spPr>
           <a:xfrm>
-            <a:off x="640080" y="3476274"/>
+            <a:off x="640080" y="3503638"/>
             <a:ext cx="7863840" cy="274320"/>
           </a:xfrm>
           <a:prstGeom prst="rect">

--- a/tests/benchmark/architectural_slides/case_028_energy_metrics_chart/output.pptx
+++ b/tests/benchmark/architectural_slides/case_028_energy_metrics_chart/output.pptx
@@ -981,7 +981,32 @@
       </p:sp>
       <p:sp>
         <p:nvSpPr>
-          <p:cNvPr id="4" name="Text 2"/>
+          <p:cNvPr id="4" name="Shape 2"/>
+          <p:cNvSpPr/>
+          <p:nvPr/>
+        </p:nvSpPr>
+        <p:spPr>
+          <a:xfrm>
+            <a:off x="640080" y="1492758"/>
+            <a:ext cx="2545080" cy="721195"/>
+          </a:xfrm>
+          <a:prstGeom prst="rect">
+            <a:avLst/>
+          </a:prstGeom>
+          <a:solidFill>
+            <a:srgbClr val="FFFFFF"/>
+          </a:solidFill>
+          <a:ln w="12700">
+            <a:solidFill>
+              <a:srgbClr val="D9D5CF"/>
+            </a:solidFill>
+            <a:prstDash val="solid"/>
+          </a:ln>
+        </p:spPr>
+      </p:sp>
+      <p:sp>
+        <p:nvSpPr>
+          <p:cNvPr id="5" name="Text 3"/>
           <p:cNvSpPr/>
           <p:nvPr/>
         </p:nvSpPr>
@@ -1020,7 +1045,32 @@
       </p:sp>
       <p:sp>
         <p:nvSpPr>
-          <p:cNvPr id="5" name="Text 3"/>
+          <p:cNvPr id="6" name="Shape 4"/>
+          <p:cNvSpPr/>
+          <p:nvPr/>
+        </p:nvSpPr>
+        <p:spPr>
+          <a:xfrm>
+            <a:off x="3299460" y="1492758"/>
+            <a:ext cx="2545080" cy="721195"/>
+          </a:xfrm>
+          <a:prstGeom prst="rect">
+            <a:avLst/>
+          </a:prstGeom>
+          <a:solidFill>
+            <a:srgbClr val="FFFFFF"/>
+          </a:solidFill>
+          <a:ln w="12700">
+            <a:solidFill>
+              <a:srgbClr val="D9D5CF"/>
+            </a:solidFill>
+            <a:prstDash val="solid"/>
+          </a:ln>
+        </p:spPr>
+      </p:sp>
+      <p:sp>
+        <p:nvSpPr>
+          <p:cNvPr id="7" name="Text 5"/>
           <p:cNvSpPr/>
           <p:nvPr/>
         </p:nvSpPr>
@@ -1059,7 +1109,32 @@
       </p:sp>
       <p:sp>
         <p:nvSpPr>
-          <p:cNvPr id="6" name="Text 4"/>
+          <p:cNvPr id="8" name="Shape 6"/>
+          <p:cNvSpPr/>
+          <p:nvPr/>
+        </p:nvSpPr>
+        <p:spPr>
+          <a:xfrm>
+            <a:off x="5958840" y="1492758"/>
+            <a:ext cx="2545080" cy="721195"/>
+          </a:xfrm>
+          <a:prstGeom prst="rect">
+            <a:avLst/>
+          </a:prstGeom>
+          <a:solidFill>
+            <a:srgbClr val="FFFFFF"/>
+          </a:solidFill>
+          <a:ln w="12700">
+            <a:solidFill>
+              <a:srgbClr val="D9D5CF"/>
+            </a:solidFill>
+            <a:prstDash val="solid"/>
+          </a:ln>
+        </p:spPr>
+      </p:sp>
+      <p:sp>
+        <p:nvSpPr>
+          <p:cNvPr id="9" name="Text 7"/>
           <p:cNvSpPr/>
           <p:nvPr/>
         </p:nvSpPr>
@@ -1098,7 +1173,32 @@
       </p:sp>
       <p:sp>
         <p:nvSpPr>
-          <p:cNvPr id="7" name="Text 5"/>
+          <p:cNvPr id="10" name="Shape 8"/>
+          <p:cNvSpPr/>
+          <p:nvPr/>
+        </p:nvSpPr>
+        <p:spPr>
+          <a:xfrm>
+            <a:off x="640080" y="2328253"/>
+            <a:ext cx="2545080" cy="721195"/>
+          </a:xfrm>
+          <a:prstGeom prst="rect">
+            <a:avLst/>
+          </a:prstGeom>
+          <a:solidFill>
+            <a:srgbClr val="FFFFFF"/>
+          </a:solidFill>
+          <a:ln w="12700">
+            <a:solidFill>
+              <a:srgbClr val="D9D5CF"/>
+            </a:solidFill>
+            <a:prstDash val="solid"/>
+          </a:ln>
+        </p:spPr>
+      </p:sp>
+      <p:sp>
+        <p:nvSpPr>
+          <p:cNvPr id="11" name="Text 9"/>
           <p:cNvSpPr/>
           <p:nvPr/>
         </p:nvSpPr>
@@ -1137,7 +1237,7 @@
       </p:sp>
       <p:sp>
         <p:nvSpPr>
-          <p:cNvPr id="8" name="Shape 6"/>
+          <p:cNvPr id="12" name="Shape 10"/>
           <p:cNvSpPr/>
           <p:nvPr/>
         </p:nvSpPr>
@@ -1152,24 +1252,24 @@
           <a:solidFill>
             <a:srgbClr val="FFFFFF"/>
           </a:solidFill>
-          <a:ln w="12700">
+          <a:ln w="19050">
             <a:solidFill>
-              <a:srgbClr val="333333"/>
+              <a:srgbClr val="8B4513"/>
             </a:solidFill>
-            <a:prstDash val="solid"/>
+            <a:prstDash val="dash"/>
           </a:ln>
         </p:spPr>
       </p:sp>
       <p:sp>
         <p:nvSpPr>
-          <p:cNvPr id="9" name="Text 7"/>
+          <p:cNvPr id="13" name="Text 11"/>
           <p:cNvSpPr/>
           <p:nvPr/>
         </p:nvSpPr>
         <p:spPr>
           <a:xfrm>
-            <a:off x="640080" y="3503638"/>
-            <a:ext cx="7863840" cy="274320"/>
+            <a:off x="777240" y="3457918"/>
+            <a:ext cx="7589520" cy="365760"/>
           </a:xfrm>
           <a:prstGeom prst="rect">
             <a:avLst/>
@@ -1189,8 +1289,11 @@
                 <a:solidFill>
                   <a:srgbClr val="777777"/>
                 </a:solidFill>
+                <a:latin typeface="Microsoft YaHei" pitchFamily="34" charset="0"/>
+                <a:ea typeface="Microsoft YaHei" pitchFamily="34" charset="-122"/>
+                <a:cs typeface="Microsoft YaHei" pitchFamily="34" charset="-120"/>
               </a:rPr>
-              <a:t>图表占位</a:t>
+              <a:t>素材缺失/路径未解析</a:t>
             </a:r>
             <a:endParaRPr lang="en-US" sz="1200" dirty="0"/>
           </a:p>
@@ -1198,7 +1301,7 @@
       </p:sp>
       <p:sp>
         <p:nvSpPr>
-          <p:cNvPr id="10" name="Text 8"/>
+          <p:cNvPr id="14" name="Text 12"/>
           <p:cNvSpPr/>
           <p:nvPr/>
         </p:nvSpPr>

--- a/tests/benchmark/architectural_slides/case_028_energy_metrics_chart/output.pptx
+++ b/tests/benchmark/architectural_slides/case_028_energy_metrics_chart/output.pptx
@@ -1235,12 +1235,19 @@
           </a:p>
         </p:txBody>
       </p:sp>
-      <p:sp>
-        <p:nvSpPr>
-          <p:cNvPr id="12" name="Shape 10"/>
-          <p:cNvSpPr/>
+      <p:pic>
+        <p:nvPicPr>
+          <p:cNvPr id="12" name="Image 0" descr="C:\Users\navib\Desktop\development\Archium-Agent\tests\benchmark\architectural_slides\case_028_energy_metrics_chart\assets\c0280001-0001-4001-8001-000000000001.png">    </p:cNvPr>
+          <p:cNvPicPr>
+            <a:picLocks noChangeAspect="1"/>
+          </p:cNvPicPr>
           <p:nvPr/>
-        </p:nvSpPr>
+        </p:nvPicPr>
+        <p:blipFill>
+          <a:blip r:embed="rId1"/>
+          <a:srcRect l="0" r="0" t="0" b="0"/>
+          <a:stretch/>
+        </p:blipFill>
         <p:spPr>
           <a:xfrm>
             <a:off x="640080" y="3163748"/>
@@ -1249,59 +1256,11 @@
           <a:prstGeom prst="rect">
             <a:avLst/>
           </a:prstGeom>
-          <a:solidFill>
-            <a:srgbClr val="FFFFFF"/>
-          </a:solidFill>
-          <a:ln w="19050">
-            <a:solidFill>
-              <a:srgbClr val="8B4513"/>
-            </a:solidFill>
-            <a:prstDash val="dash"/>
-          </a:ln>
-        </p:spPr>
-      </p:sp>
-      <p:sp>
-        <p:nvSpPr>
-          <p:cNvPr id="13" name="Text 11"/>
-          <p:cNvSpPr/>
-          <p:nvPr/>
-        </p:nvSpPr>
-        <p:spPr>
-          <a:xfrm>
-            <a:off x="777240" y="3457918"/>
-            <a:ext cx="7589520" cy="365760"/>
-          </a:xfrm>
-          <a:prstGeom prst="rect">
-            <a:avLst/>
-          </a:prstGeom>
-          <a:noFill/>
-          <a:ln/>
-        </p:spPr>
-        <p:txBody>
-          <a:bodyPr wrap="square" rtlCol="0" anchor="ctr"/>
-          <a:lstStyle/>
-          <a:p>
-            <a:pPr algn="ctr" indent="0" marL="0">
-              <a:buNone/>
-            </a:pPr>
-            <a:r>
-              <a:rPr lang="en-US" sz="1200" dirty="0">
-                <a:solidFill>
-                  <a:srgbClr val="777777"/>
-                </a:solidFill>
-                <a:latin typeface="Microsoft YaHei" pitchFamily="34" charset="0"/>
-                <a:ea typeface="Microsoft YaHei" pitchFamily="34" charset="-122"/>
-                <a:cs typeface="Microsoft YaHei" pitchFamily="34" charset="-120"/>
-              </a:rPr>
-              <a:t>素材缺失/路径未解析</a:t>
-            </a:r>
-            <a:endParaRPr lang="en-US" sz="1200" dirty="0"/>
-          </a:p>
-        </p:txBody>
-      </p:sp>
-      <p:sp>
-        <p:nvSpPr>
-          <p:cNvPr id="14" name="Text 12"/>
+        </p:spPr>
+      </p:pic>
+      <p:sp>
+        <p:nvSpPr>
+          <p:cNvPr id="13" name="Text 10"/>
           <p:cNvSpPr/>
           <p:nvPr/>
         </p:nvSpPr>

--- a/tests/benchmark/architectural_slides/case_028_energy_metrics_chart/output.pptx
+++ b/tests/benchmark/architectural_slides/case_028_energy_metrics_chart/output.pptx
@@ -910,7 +910,7 @@
         <p:spPr>
           <a:xfrm>
             <a:off x="640080" y="411480"/>
-            <a:ext cx="7863840" cy="601218"/>
+            <a:ext cx="7863840" cy="621792"/>
           </a:xfrm>
           <a:prstGeom prst="rect">
             <a:avLst/>
@@ -948,7 +948,7 @@
         </p:nvSpPr>
         <p:spPr>
           <a:xfrm>
-            <a:off x="640080" y="1050798"/>
+            <a:off x="640080" y="1071372"/>
             <a:ext cx="7863840" cy="365760"/>
           </a:xfrm>
           <a:prstGeom prst="rect">
@@ -987,8 +987,8 @@
         </p:nvSpPr>
         <p:spPr>
           <a:xfrm>
-            <a:off x="640080" y="1492758"/>
-            <a:ext cx="2545080" cy="721195"/>
+            <a:off x="640080" y="1513332"/>
+            <a:ext cx="2545080" cy="714817"/>
           </a:xfrm>
           <a:prstGeom prst="rect">
             <a:avLst/>
@@ -1012,8 +1012,8 @@
         </p:nvSpPr>
         <p:spPr>
           <a:xfrm>
-            <a:off x="640080" y="1492758"/>
-            <a:ext cx="2545080" cy="721195"/>
+            <a:off x="640080" y="1513332"/>
+            <a:ext cx="2545080" cy="714817"/>
           </a:xfrm>
           <a:prstGeom prst="rect">
             <a:avLst/>
@@ -1051,8 +1051,8 @@
         </p:nvSpPr>
         <p:spPr>
           <a:xfrm>
-            <a:off x="3299460" y="1492758"/>
-            <a:ext cx="2545080" cy="721195"/>
+            <a:off x="3299460" y="1513332"/>
+            <a:ext cx="2545080" cy="714817"/>
           </a:xfrm>
           <a:prstGeom prst="rect">
             <a:avLst/>
@@ -1076,8 +1076,8 @@
         </p:nvSpPr>
         <p:spPr>
           <a:xfrm>
-            <a:off x="3299460" y="1492758"/>
-            <a:ext cx="2545080" cy="721195"/>
+            <a:off x="3299460" y="1513332"/>
+            <a:ext cx="2545080" cy="714817"/>
           </a:xfrm>
           <a:prstGeom prst="rect">
             <a:avLst/>
@@ -1115,8 +1115,8 @@
         </p:nvSpPr>
         <p:spPr>
           <a:xfrm>
-            <a:off x="5958840" y="1492758"/>
-            <a:ext cx="2545080" cy="721195"/>
+            <a:off x="5958840" y="1513332"/>
+            <a:ext cx="2545080" cy="714817"/>
           </a:xfrm>
           <a:prstGeom prst="rect">
             <a:avLst/>
@@ -1140,8 +1140,8 @@
         </p:nvSpPr>
         <p:spPr>
           <a:xfrm>
-            <a:off x="5958840" y="1492758"/>
-            <a:ext cx="2545080" cy="721195"/>
+            <a:off x="5958840" y="1513332"/>
+            <a:ext cx="2545080" cy="714817"/>
           </a:xfrm>
           <a:prstGeom prst="rect">
             <a:avLst/>
@@ -1179,8 +1179,8 @@
         </p:nvSpPr>
         <p:spPr>
           <a:xfrm>
-            <a:off x="640080" y="2328253"/>
-            <a:ext cx="2545080" cy="721195"/>
+            <a:off x="640080" y="2342449"/>
+            <a:ext cx="2545080" cy="714817"/>
           </a:xfrm>
           <a:prstGeom prst="rect">
             <a:avLst/>
@@ -1204,8 +1204,8 @@
         </p:nvSpPr>
         <p:spPr>
           <a:xfrm>
-            <a:off x="640080" y="2328253"/>
-            <a:ext cx="2545080" cy="721195"/>
+            <a:off x="640080" y="2342449"/>
+            <a:ext cx="2545080" cy="714817"/>
           </a:xfrm>
           <a:prstGeom prst="rect">
             <a:avLst/>
@@ -1250,8 +1250,8 @@
         </p:blipFill>
         <p:spPr>
           <a:xfrm>
-            <a:off x="640080" y="3163748"/>
-            <a:ext cx="7863840" cy="954100"/>
+            <a:off x="640080" y="3171566"/>
+            <a:ext cx="7863840" cy="946282"/>
           </a:xfrm>
           <a:prstGeom prst="rect">
             <a:avLst/>

--- a/tests/benchmark/architectural_slides/case_028_energy_metrics_chart/output.pptx
+++ b/tests/benchmark/architectural_slides/case_028_energy_metrics_chart/output.pptx
@@ -910,7 +910,7 @@
         <p:spPr>
           <a:xfrm>
             <a:off x="640080" y="411480"/>
-            <a:ext cx="7863840" cy="621792"/>
+            <a:ext cx="7863840" cy="601218"/>
           </a:xfrm>
           <a:prstGeom prst="rect">
             <a:avLst/>
@@ -948,7 +948,7 @@
         </p:nvSpPr>
         <p:spPr>
           <a:xfrm>
-            <a:off x="640080" y="1071372"/>
+            <a:off x="640080" y="1050798"/>
             <a:ext cx="7863840" cy="365760"/>
           </a:xfrm>
           <a:prstGeom prst="rect">
@@ -987,8 +987,8 @@
         </p:nvSpPr>
         <p:spPr>
           <a:xfrm>
-            <a:off x="640080" y="1513332"/>
-            <a:ext cx="2545080" cy="714817"/>
+            <a:off x="640080" y="1492758"/>
+            <a:ext cx="2545080" cy="721195"/>
           </a:xfrm>
           <a:prstGeom prst="rect">
             <a:avLst/>
@@ -1012,8 +1012,8 @@
         </p:nvSpPr>
         <p:spPr>
           <a:xfrm>
-            <a:off x="640080" y="1513332"/>
-            <a:ext cx="2545080" cy="714817"/>
+            <a:off x="640080" y="1492758"/>
+            <a:ext cx="2545080" cy="721195"/>
           </a:xfrm>
           <a:prstGeom prst="rect">
             <a:avLst/>
@@ -1051,8 +1051,8 @@
         </p:nvSpPr>
         <p:spPr>
           <a:xfrm>
-            <a:off x="3299460" y="1513332"/>
-            <a:ext cx="2545080" cy="714817"/>
+            <a:off x="3299460" y="1492758"/>
+            <a:ext cx="2545080" cy="721195"/>
           </a:xfrm>
           <a:prstGeom prst="rect">
             <a:avLst/>
@@ -1076,8 +1076,8 @@
         </p:nvSpPr>
         <p:spPr>
           <a:xfrm>
-            <a:off x="3299460" y="1513332"/>
-            <a:ext cx="2545080" cy="714817"/>
+            <a:off x="3299460" y="1492758"/>
+            <a:ext cx="2545080" cy="721195"/>
           </a:xfrm>
           <a:prstGeom prst="rect">
             <a:avLst/>
@@ -1115,8 +1115,8 @@
         </p:nvSpPr>
         <p:spPr>
           <a:xfrm>
-            <a:off x="5958840" y="1513332"/>
-            <a:ext cx="2545080" cy="714817"/>
+            <a:off x="5958840" y="1492758"/>
+            <a:ext cx="2545080" cy="721195"/>
           </a:xfrm>
           <a:prstGeom prst="rect">
             <a:avLst/>
@@ -1140,8 +1140,8 @@
         </p:nvSpPr>
         <p:spPr>
           <a:xfrm>
-            <a:off x="5958840" y="1513332"/>
-            <a:ext cx="2545080" cy="714817"/>
+            <a:off x="5958840" y="1492758"/>
+            <a:ext cx="2545080" cy="721195"/>
           </a:xfrm>
           <a:prstGeom prst="rect">
             <a:avLst/>
@@ -1179,8 +1179,8 @@
         </p:nvSpPr>
         <p:spPr>
           <a:xfrm>
-            <a:off x="640080" y="2342449"/>
-            <a:ext cx="2545080" cy="714817"/>
+            <a:off x="640080" y="2328253"/>
+            <a:ext cx="2545080" cy="721195"/>
           </a:xfrm>
           <a:prstGeom prst="rect">
             <a:avLst/>
@@ -1204,8 +1204,8 @@
         </p:nvSpPr>
         <p:spPr>
           <a:xfrm>
-            <a:off x="640080" y="2342449"/>
-            <a:ext cx="2545080" cy="714817"/>
+            <a:off x="640080" y="2328253"/>
+            <a:ext cx="2545080" cy="721195"/>
           </a:xfrm>
           <a:prstGeom prst="rect">
             <a:avLst/>
@@ -1250,8 +1250,8 @@
         </p:blipFill>
         <p:spPr>
           <a:xfrm>
-            <a:off x="640080" y="3171566"/>
-            <a:ext cx="7863840" cy="946282"/>
+            <a:off x="640080" y="3163748"/>
+            <a:ext cx="7863840" cy="954100"/>
           </a:xfrm>
           <a:prstGeom prst="rect">
             <a:avLst/>
